--- a/Chapter Two 1447/CSC 621 Research Methods/Lectures/Ch-09-PPTaccessible.pptx
+++ b/Chapter Two 1447/CSC 621 Research Methods/Lectures/Ch-09-PPTaccessible.pptx
@@ -2,29 +2,29 @@
 <file path=ppt/presentation.xml><?xml version="1.0" encoding="utf-8"?>
 <p:presentation xmlns:a="http://schemas.openxmlformats.org/drawingml/2006/main" xmlns:r="http://schemas.openxmlformats.org/officeDocument/2006/relationships" xmlns:p="http://schemas.openxmlformats.org/presentationml/2006/main" strictFirstAndLastChars="0" saveSubsetFonts="1" autoCompressPictures="0">
   <p:sldMasterIdLst>
-    <p:sldMasterId id="2147483659" r:id="rId1"/>
-    <p:sldMasterId id="2147483660" r:id="rId2"/>
+    <p:sldMasterId id="2147483659" r:id="rId4"/>
+    <p:sldMasterId id="2147483660" r:id="rId5"/>
   </p:sldMasterIdLst>
   <p:notesMasterIdLst>
-    <p:notesMasterId r:id="rId16"/>
+    <p:notesMasterId r:id="rId19"/>
   </p:notesMasterIdLst>
   <p:handoutMasterIdLst>
-    <p:handoutMasterId r:id="rId17"/>
+    <p:handoutMasterId r:id="rId20"/>
   </p:handoutMasterIdLst>
   <p:sldIdLst>
-    <p:sldId id="335" r:id="rId3"/>
-    <p:sldId id="307" r:id="rId4"/>
-    <p:sldId id="308" r:id="rId5"/>
-    <p:sldId id="342" r:id="rId6"/>
-    <p:sldId id="310" r:id="rId7"/>
-    <p:sldId id="311" r:id="rId8"/>
-    <p:sldId id="338" r:id="rId9"/>
-    <p:sldId id="339" r:id="rId10"/>
-    <p:sldId id="340" r:id="rId11"/>
-    <p:sldId id="312" r:id="rId12"/>
-    <p:sldId id="341" r:id="rId13"/>
-    <p:sldId id="313" r:id="rId14"/>
-    <p:sldId id="334" r:id="rId15"/>
+    <p:sldId id="335" r:id="rId6"/>
+    <p:sldId id="307" r:id="rId7"/>
+    <p:sldId id="308" r:id="rId8"/>
+    <p:sldId id="342" r:id="rId9"/>
+    <p:sldId id="310" r:id="rId10"/>
+    <p:sldId id="311" r:id="rId11"/>
+    <p:sldId id="338" r:id="rId12"/>
+    <p:sldId id="339" r:id="rId13"/>
+    <p:sldId id="340" r:id="rId14"/>
+    <p:sldId id="312" r:id="rId15"/>
+    <p:sldId id="341" r:id="rId16"/>
+    <p:sldId id="313" r:id="rId17"/>
+    <p:sldId id="334" r:id="rId18"/>
   </p:sldIdLst>
   <p:sldSz cx="9144000" cy="6858000" type="screen4x3"/>
   <p:notesSz cx="6858000" cy="9144000"/>
@@ -367,7 +367,7 @@
           <a:p>
             <a:fld id="{2885CB01-6679-D646-ACB3-8B04B786C15F}" type="datetimeFigureOut">
               <a:rPr lang="en-US" smtClean="0"/>
-              <a:t>10/20/2021</a:t>
+              <a:t>5/31/2026</a:t>
             </a:fld>
             <a:endParaRPr lang="en-US"/>
           </a:p>
@@ -16255,8 +16255,8 @@
         </p:nvSpPr>
         <p:spPr>
           <a:xfrm>
-            <a:off x="457200" y="303062"/>
-            <a:ext cx="8229600" cy="1144347"/>
+            <a:off x="457200" y="980170"/>
+            <a:ext cx="8229600" cy="467239"/>
           </a:xfrm>
         </p:spPr>
         <p:txBody>
@@ -16272,13 +16272,13 @@
               <a:buClrTx/>
             </a:pPr>
             <a:r>
-              <a:rPr lang="en-US" altLang="en-US" sz="3600" kern="1200" dirty="0">
+              <a:rPr lang="en-US" altLang="en-US" sz="2800" kern="1200" dirty="0">
                 <a:latin typeface="+mj-lt"/>
                 <a:cs typeface="Times New Roman" panose="02020603050405020304" pitchFamily="18" charset="0"/>
               </a:rPr>
               <a:t>Analyzing and Interpreting Mixed-Methods Data</a:t>
             </a:r>
-            <a:endParaRPr lang="en-US" sz="2800" kern="1200" dirty="0">
+            <a:endParaRPr lang="en-US" sz="2000" kern="1200" dirty="0">
               <a:latin typeface="+mj-lt"/>
               <a:ea typeface="+mj-ea"/>
               <a:cs typeface="Times New Roman" panose="02020603050405020304" pitchFamily="18" charset="0"/>
@@ -19457,6 +19457,21 @@
 </file>
 
 <file path=customXml/item1.xml><?xml version="1.0" encoding="utf-8"?>
+<p:properties xmlns:p="http://schemas.microsoft.com/office/2006/metadata/properties" xmlns:xsi="http://www.w3.org/2001/XMLSchema-instance" xmlns:pc="http://schemas.microsoft.com/office/infopath/2007/PartnerControls">
+  <documentManagement/>
+</p:properties>
+</file>
+
+<file path=customXml/item2.xml><?xml version="1.0" encoding="utf-8"?>
+<?mso-contentType ?>
+<FormTemplates xmlns="http://schemas.microsoft.com/sharepoint/v3/contenttype/forms">
+  <Display>DocumentLibraryForm</Display>
+  <Edit>DocumentLibraryForm</Edit>
+  <New>DocumentLibraryForm</New>
+</FormTemplates>
+</file>
+
+<file path=customXml/item3.xml><?xml version="1.0" encoding="utf-8"?>
 <ct:contentTypeSchema xmlns:ct="http://schemas.microsoft.com/office/2006/metadata/contentType" xmlns:ma="http://schemas.microsoft.com/office/2006/metadata/properties/metaAttributes" ct:_="" ma:_="" ma:contentTypeName="Document" ma:contentTypeID="0x01010086D90B95B22DD945BDFF45EB84A5E21C" ma:contentTypeVersion="12" ma:contentTypeDescription="Create a new document." ma:contentTypeScope="" ma:versionID="9ee3781bcb6633d132c89161492bb118">
   <xsd:schema xmlns:xsd="http://www.w3.org/2001/XMLSchema" xmlns:xs="http://www.w3.org/2001/XMLSchema" xmlns:p="http://schemas.microsoft.com/office/2006/metadata/properties" xmlns:ns2="7c1bd8dc-4e40-424f-a15f-9ffcd522197f" xmlns:ns3="6125ffc9-2c56-435e-8267-1393444907b2" targetNamespace="http://schemas.microsoft.com/office/2006/metadata/properties" ma:root="true" ma:fieldsID="d3e430f46b92204fb5a3381a429c4dbe" ns2:_="" ns3:_="">
     <xsd:import namespace="7c1bd8dc-4e40-424f-a15f-9ffcd522197f"/>
@@ -19673,29 +19688,38 @@
 </ct:contentTypeSchema>
 </file>
 
-<file path=customXml/item2.xml><?xml version="1.0" encoding="utf-8"?>
-<?mso-contentType ?>
-<FormTemplates xmlns="http://schemas.microsoft.com/sharepoint/v3/contenttype/forms">
-  <Display>DocumentLibraryForm</Display>
-  <Edit>DocumentLibraryForm</Edit>
-  <New>DocumentLibraryForm</New>
-</FormTemplates>
-</file>
-
-<file path=customXml/item3.xml><?xml version="1.0" encoding="utf-8"?>
-<p:properties xmlns:p="http://schemas.microsoft.com/office/2006/metadata/properties" xmlns:xsi="http://www.w3.org/2001/XMLSchema-instance" xmlns:pc="http://schemas.microsoft.com/office/infopath/2007/PartnerControls">
-  <documentManagement/>
-</p:properties>
-</file>
-
 <file path=customXml/itemProps1.xml><?xml version="1.0" encoding="utf-8"?>
-<ds:datastoreItem xmlns:ds="http://schemas.openxmlformats.org/officeDocument/2006/customXml" ds:itemID="{C944D3BB-5530-45F5-8009-24BE1EAE62CD}"/>
+<ds:datastoreItem xmlns:ds="http://schemas.openxmlformats.org/officeDocument/2006/customXml" ds:itemID="{5448D24B-9F40-4BC9-9E82-8D7BA94627C1}">
+  <ds:schemaRefs>
+    <ds:schemaRef ds:uri="http://schemas.microsoft.com/office/2006/metadata/properties"/>
+    <ds:schemaRef ds:uri="http://schemas.microsoft.com/office/infopath/2007/PartnerControls"/>
+  </ds:schemaRefs>
+</ds:datastoreItem>
 </file>
 
 <file path=customXml/itemProps2.xml><?xml version="1.0" encoding="utf-8"?>
-<ds:datastoreItem xmlns:ds="http://schemas.openxmlformats.org/officeDocument/2006/customXml" ds:itemID="{EB3974BE-3157-4651-8BC6-D915B962EFEF}"/>
+<ds:datastoreItem xmlns:ds="http://schemas.openxmlformats.org/officeDocument/2006/customXml" ds:itemID="{EB3974BE-3157-4651-8BC6-D915B962EFEF}">
+  <ds:schemaRefs>
+    <ds:schemaRef ds:uri="http://schemas.microsoft.com/sharepoint/v3/contenttype/forms"/>
+  </ds:schemaRefs>
+</ds:datastoreItem>
 </file>
 
 <file path=customXml/itemProps3.xml><?xml version="1.0" encoding="utf-8"?>
-<ds:datastoreItem xmlns:ds="http://schemas.openxmlformats.org/officeDocument/2006/customXml" ds:itemID="{5448D24B-9F40-4BC9-9E82-8D7BA94627C1}"/>
+<ds:datastoreItem xmlns:ds="http://schemas.openxmlformats.org/officeDocument/2006/customXml" ds:itemID="{C944D3BB-5530-45F5-8009-24BE1EAE62CD}">
+  <ds:schemaRefs>
+    <ds:schemaRef ds:uri="http://schemas.microsoft.com/office/2006/metadata/contentType"/>
+    <ds:schemaRef ds:uri="http://schemas.microsoft.com/office/2006/metadata/properties/metaAttributes"/>
+    <ds:schemaRef ds:uri="http://www.w3.org/2001/XMLSchema"/>
+    <ds:schemaRef ds:uri="http://schemas.microsoft.com/office/2006/metadata/properties"/>
+    <ds:schemaRef ds:uri="7c1bd8dc-4e40-424f-a15f-9ffcd522197f"/>
+    <ds:schemaRef ds:uri="6125ffc9-2c56-435e-8267-1393444907b2"/>
+    <ds:schemaRef ds:uri="http://schemas.microsoft.com/office/2006/documentManagement/types"/>
+    <ds:schemaRef ds:uri="http://schemas.microsoft.com/office/infopath/2007/PartnerControls"/>
+    <ds:schemaRef ds:uri="http://schemas.openxmlformats.org/package/2006/metadata/core-properties"/>
+    <ds:schemaRef ds:uri="http://purl.org/dc/elements/1.1/"/>
+    <ds:schemaRef ds:uri="http://purl.org/dc/terms/"/>
+    <ds:schemaRef ds:uri="http://schemas.microsoft.com/internal/obd"/>
+  </ds:schemaRefs>
+</ds:datastoreItem>
 </file>